--- a/deliverables/visa_vs_mastercard_presentation.pptx
+++ b/deliverables/visa_vs_mastercard_presentation.pptx
@@ -3761,7 +3761,7 @@
               </a:defRPr>
             </a:pPr>
             <a:r>
-              <a:t>$39.1bn</a:t>
+              <a:t>$40.0bn</a:t>
             </a:r>
           </a:p>
         </p:txBody>
@@ -3827,7 +3827,7 @@
               </a:defRPr>
             </a:pPr>
             <a:r>
-              <a:t>$19.6bn</a:t>
+              <a:t>$20.1bn</a:t>
             </a:r>
           </a:p>
         </p:txBody>
@@ -3893,7 +3893,7 @@
               </a:defRPr>
             </a:pPr>
             <a:r>
-              <a:t>$32.0bn</a:t>
+              <a:t>$32.8bn</a:t>
             </a:r>
           </a:p>
         </p:txBody>
@@ -3959,7 +3959,7 @@
               </a:defRPr>
             </a:pPr>
             <a:r>
-              <a:t>$14.6bn</a:t>
+              <a:t>$15.0bn</a:t>
             </a:r>
           </a:p>
         </p:txBody>
